--- a/print/C-Garden-Menu-A4.pptx
+++ b/print/C-Garden-Menu-A4.pptx
@@ -3148,7 +3148,7 @@
         </p:blipFill>
         <p:spPr>
           <a:xfrm>
-            <a:off x="2729484" y="411480"/>
+            <a:off x="2729484" y="164592"/>
             <a:ext cx="2103120" cy="1752600"/>
           </a:xfrm>
           <a:prstGeom prst="rect">
@@ -3164,7 +3164,7 @@
         </p:nvSpPr>
         <p:spPr>
           <a:xfrm>
-            <a:off x="0" y="2331720"/>
+            <a:off x="0" y="2286000"/>
             <a:ext cx="7562088" cy="365760"/>
           </a:xfrm>
           <a:prstGeom prst="rect">
@@ -3173,7 +3173,7 @@
           <a:noFill/>
         </p:spPr>
         <p:txBody>
-          <a:bodyPr wrap="square">
+          <a:bodyPr wrap="none">
             <a:spAutoFit/>
           </a:bodyPr>
           <a:lstStyle/>
@@ -3214,9 +3214,6 @@
           <a:lstStyle/>
           <a:p>
             <a:pPr>
-              <a:spcBef>
-                <a:spcPts val="1400"/>
-              </a:spcBef>
               <a:spcAft>
                 <a:spcPts val="200"/>
               </a:spcAft>
@@ -3358,6 +3355,37 @@
           <a:p>
             <a:pPr>
               <a:spcBef>
+                <a:spcPts val="300"/>
+              </a:spcBef>
+              <a:spcAft>
+                <a:spcPts val="0"/>
+              </a:spcAft>
+              <a:tabLst>
+                <a:tab pos="3200400" algn="r"/>
+              </a:tabLst>
+            </a:pPr>
+            <a:r>
+              <a:rPr sz="1150">
+                <a:solidFill>
+                  <a:srgbClr val="242C26"/>
+                </a:solidFill>
+                <a:latin typeface="Arial"/>
+              </a:rPr>
+              <a:t>Heineken</a:t>
+            </a:r>
+            <a:r>
+              <a:rPr sz="1150" b="1">
+                <a:solidFill>
+                  <a:srgbClr val="9C7A2E"/>
+                </a:solidFill>
+                <a:latin typeface="Georgia"/>
+              </a:rPr>
+              <a:t>	16,500₮</a:t>
+            </a:r>
+          </a:p>
+          <a:p>
+            <a:pPr>
+              <a:spcBef>
                 <a:spcPts val="700"/>
               </a:spcBef>
               <a:spcAft>
@@ -3951,9 +3979,6 @@
           <a:lstStyle/>
           <a:p>
             <a:pPr>
-              <a:spcBef>
-                <a:spcPts val="1400"/>
-              </a:spcBef>
               <a:spcAft>
                 <a:spcPts val="200"/>
               </a:spcAft>
@@ -4531,8 +4556,8 @@
         </p:nvSpPr>
         <p:spPr>
           <a:xfrm>
-            <a:off x="457200" y="10058400"/>
-            <a:ext cx="6647688" cy="411480"/>
+            <a:off x="457200" y="10104120"/>
+            <a:ext cx="6647688" cy="365760"/>
           </a:xfrm>
           <a:prstGeom prst="rect">
             <a:avLst/>
@@ -4540,7 +4565,7 @@
           <a:noFill/>
         </p:spPr>
         <p:txBody>
-          <a:bodyPr wrap="square">
+          <a:bodyPr wrap="none">
             <a:spAutoFit/>
           </a:bodyPr>
           <a:lstStyle/>
@@ -4553,7 +4578,7 @@
                 </a:solidFill>
                 <a:latin typeface="Arial"/>
               </a:rPr>
-              <a:t>Бүх үнэ ₮.  НӨАТ 10% ба хотын татвар 2% ороогүй.</a:t>
+              <a:t>Бүх үнэ ₮.  НӨАТ болон хотын татвар багтсан.</a:t>
             </a:r>
           </a:p>
         </p:txBody>

--- a/print/C-Garden-Menu-A4.pptx
+++ b/print/C-Garden-Menu-A4.pptx
@@ -3148,7 +3148,7 @@
         </p:blipFill>
         <p:spPr>
           <a:xfrm>
-            <a:off x="2729484" y="164592"/>
+            <a:off x="2729484" y="411480"/>
             <a:ext cx="2103120" cy="1752600"/>
           </a:xfrm>
           <a:prstGeom prst="rect">
@@ -3287,7 +3287,7 @@
                 </a:solidFill>
                 <a:latin typeface="Georgia"/>
               </a:rPr>
-              <a:t>	15,000₮</a:t>
+              <a:t>	15,000</a:t>
             </a:r>
           </a:p>
           <a:p>
@@ -3318,7 +3318,7 @@
                 </a:solidFill>
                 <a:latin typeface="Georgia"/>
               </a:rPr>
-              <a:t>	15,000₮</a:t>
+              <a:t>	15,000</a:t>
             </a:r>
           </a:p>
           <a:p>
@@ -3349,7 +3349,7 @@
                 </a:solidFill>
                 <a:latin typeface="Georgia"/>
               </a:rPr>
-              <a:t>	16,000₮</a:t>
+              <a:t>	16,000</a:t>
             </a:r>
           </a:p>
           <a:p>
@@ -3380,7 +3380,7 @@
                 </a:solidFill>
                 <a:latin typeface="Georgia"/>
               </a:rPr>
-              <a:t>	16,500₮</a:t>
+              <a:t>	16,500</a:t>
             </a:r>
           </a:p>
           <a:p>
@@ -3442,7 +3442,7 @@
                 </a:solidFill>
                 <a:latin typeface="Georgia"/>
               </a:rPr>
-              <a:t>	18,000₮</a:t>
+              <a:t>	18,000</a:t>
             </a:r>
           </a:p>
           <a:p>
@@ -3473,7 +3473,7 @@
                 </a:solidFill>
                 <a:latin typeface="Georgia"/>
               </a:rPr>
-              <a:t>	16,000₮</a:t>
+              <a:t>	16,000</a:t>
             </a:r>
           </a:p>
           <a:p>
@@ -3504,7 +3504,7 @@
                 </a:solidFill>
                 <a:latin typeface="Georgia"/>
               </a:rPr>
-              <a:t>	15,000₮</a:t>
+              <a:t>	15,000</a:t>
             </a:r>
           </a:p>
           <a:p>
@@ -3535,7 +3535,7 @@
                 </a:solidFill>
                 <a:latin typeface="Georgia"/>
               </a:rPr>
-              <a:t>	12,000₮</a:t>
+              <a:t>	12,000</a:t>
             </a:r>
           </a:p>
           <a:p>
@@ -3597,7 +3597,7 @@
                 </a:solidFill>
                 <a:latin typeface="Georgia"/>
               </a:rPr>
-              <a:t>	12,000₮</a:t>
+              <a:t>	12,000</a:t>
             </a:r>
           </a:p>
           <a:p>
@@ -3628,7 +3628,7 @@
                 </a:solidFill>
                 <a:latin typeface="Georgia"/>
               </a:rPr>
-              <a:t>	16,000₮</a:t>
+              <a:t>	16,000</a:t>
             </a:r>
           </a:p>
           <a:p>
@@ -3697,7 +3697,7 @@
                 </a:solidFill>
                 <a:latin typeface="Georgia"/>
               </a:rPr>
-              <a:t>	7,500₮</a:t>
+              <a:t>	7,500</a:t>
             </a:r>
           </a:p>
           <a:p>
@@ -3728,7 +3728,7 @@
                 </a:solidFill>
                 <a:latin typeface="Georgia"/>
               </a:rPr>
-              <a:t>	7,500₮</a:t>
+              <a:t>	7,500</a:t>
             </a:r>
           </a:p>
           <a:p>
@@ -3790,7 +3790,7 @@
                 </a:solidFill>
                 <a:latin typeface="Georgia"/>
               </a:rPr>
-              <a:t>	7,000₮</a:t>
+              <a:t>	7,000</a:t>
             </a:r>
           </a:p>
           <a:p>
@@ -3821,7 +3821,7 @@
                 </a:solidFill>
                 <a:latin typeface="Georgia"/>
               </a:rPr>
-              <a:t>	7,000₮</a:t>
+              <a:t>	7,000</a:t>
             </a:r>
           </a:p>
           <a:p>
@@ -3871,7 +3871,7 @@
                 </a:solidFill>
                 <a:latin typeface="Georgia"/>
               </a:rPr>
-              <a:t>	5,000₮</a:t>
+              <a:t>	5,000</a:t>
             </a:r>
           </a:p>
           <a:p>
@@ -3911,7 +3911,7 @@
                 </a:solidFill>
                 <a:latin typeface="Georgia"/>
               </a:rPr>
-              <a:t>	14,000₮</a:t>
+              <a:t>	14,000</a:t>
             </a:r>
           </a:p>
           <a:p>
@@ -3951,7 +3951,7 @@
                 </a:solidFill>
                 <a:latin typeface="Georgia"/>
               </a:rPr>
-              <a:t>	7,500₮</a:t>
+              <a:t>	7,500</a:t>
             </a:r>
           </a:p>
         </p:txBody>
@@ -4040,7 +4040,7 @@
                 </a:solidFill>
                 <a:latin typeface="Georgia"/>
               </a:rPr>
-              <a:t>	40,000₮</a:t>
+              <a:t>	40,000</a:t>
             </a:r>
           </a:p>
           <a:p>
@@ -4071,7 +4071,7 @@
                 </a:solidFill>
                 <a:latin typeface="Georgia"/>
               </a:rPr>
-              <a:t>	36,000₮</a:t>
+              <a:t>	36,000</a:t>
             </a:r>
           </a:p>
           <a:p>
@@ -4102,7 +4102,7 @@
                 </a:solidFill>
                 <a:latin typeface="Georgia"/>
               </a:rPr>
-              <a:t>	30,000₮</a:t>
+              <a:t>	30,000</a:t>
             </a:r>
           </a:p>
           <a:p>
@@ -4152,7 +4152,7 @@
                 </a:solidFill>
                 <a:latin typeface="Georgia"/>
               </a:rPr>
-              <a:t>	28,000₮</a:t>
+              <a:t>	28,000</a:t>
             </a:r>
           </a:p>
           <a:p>
@@ -4183,7 +4183,7 @@
                 </a:solidFill>
                 <a:latin typeface="Georgia"/>
               </a:rPr>
-              <a:t>	120,000₮</a:t>
+              <a:t>	120,000</a:t>
             </a:r>
           </a:p>
           <a:p>
@@ -4214,7 +4214,7 @@
                 </a:solidFill>
                 <a:latin typeface="Georgia"/>
               </a:rPr>
-              <a:t>	15,000₮</a:t>
+              <a:t>	15,000</a:t>
             </a:r>
           </a:p>
           <a:p>
@@ -4245,7 +4245,7 @@
                 </a:solidFill>
                 <a:latin typeface="Georgia"/>
               </a:rPr>
-              <a:t>	21,000₮</a:t>
+              <a:t>	21,000</a:t>
             </a:r>
           </a:p>
           <a:p>
@@ -4326,7 +4326,7 @@
                 </a:solidFill>
                 <a:latin typeface="Georgia"/>
               </a:rPr>
-              <a:t>	12,000₮</a:t>
+              <a:t>	12,000</a:t>
             </a:r>
           </a:p>
           <a:p>
@@ -4357,7 +4357,7 @@
                 </a:solidFill>
                 <a:latin typeface="Georgia"/>
               </a:rPr>
-              <a:t>	13,000₮</a:t>
+              <a:t>	13,000</a:t>
             </a:r>
           </a:p>
           <a:p>
@@ -4419,7 +4419,7 @@
                 </a:solidFill>
                 <a:latin typeface="Georgia"/>
               </a:rPr>
-              <a:t>	20,000₮</a:t>
+              <a:t>	20,000</a:t>
             </a:r>
           </a:p>
           <a:p>
@@ -4450,7 +4450,7 @@
                 </a:solidFill>
                 <a:latin typeface="Georgia"/>
               </a:rPr>
-              <a:t>	20,000₮</a:t>
+              <a:t>	20,000</a:t>
             </a:r>
           </a:p>
           <a:p>
@@ -4512,7 +4512,7 @@
                 </a:solidFill>
                 <a:latin typeface="Georgia"/>
               </a:rPr>
-              <a:t>	25,000₮</a:t>
+              <a:t>	25,000</a:t>
             </a:r>
           </a:p>
           <a:p>
@@ -4543,7 +4543,7 @@
                 </a:solidFill>
                 <a:latin typeface="Georgia"/>
               </a:rPr>
-              <a:t>	25,000₮</a:t>
+              <a:t>	25,000</a:t>
             </a:r>
           </a:p>
         </p:txBody>
@@ -4578,7 +4578,7 @@
                 </a:solidFill>
                 <a:latin typeface="Arial"/>
               </a:rPr>
-              <a:t>Бүх үнэ ₮.  НӨАТ болон хотын татвар багтсан.</a:t>
+              <a:t>Үнэ төгрөгөөр.  НӨАТ болон хотын татвар багтсан.</a:t>
             </a:r>
           </a:p>
         </p:txBody>
